--- a/Slide/Programming with Python.pptx
+++ b/Slide/Programming with Python.pptx
@@ -247,7 +247,7 @@
           <a:p>
             <a:fld id="{077A8A5C-4112-43EB-A2FF-1AA2C015EB3F}" type="datetimeFigureOut">
               <a:rPr lang="en-ID" smtClean="0"/>
-              <a:t>18/12/2024</a:t>
+              <a:t>06/01/2026</a:t>
             </a:fld>
             <a:endParaRPr lang="en-ID"/>
           </a:p>
@@ -513,6 +513,403 @@
     </a:lvl9pPr>
   </p:notesStyle>
 </p:notesMaster>
+</file>
+
+<file path=ppt/notesSlides/notesSlide1.xml><?xml version="1.0" encoding="utf-8"?>
+<p:notes xmlns:a="http://schemas.openxmlformats.org/drawingml/2006/main" xmlns:r="http://schemas.openxmlformats.org/officeDocument/2006/relationships" xmlns:p="http://schemas.openxmlformats.org/presentationml/2006/main">
+  <p:cSld>
+    <p:spTree>
+      <p:nvGrpSpPr>
+        <p:cNvPr id="1" name=""/>
+        <p:cNvGrpSpPr/>
+        <p:nvPr/>
+      </p:nvGrpSpPr>
+      <p:grpSpPr>
+        <a:xfrm>
+          <a:off x="0" y="0"/>
+          <a:ext cx="0" cy="0"/>
+          <a:chOff x="0" y="0"/>
+          <a:chExt cx="0" cy="0"/>
+        </a:xfrm>
+      </p:grpSpPr>
+      <p:sp>
+        <p:nvSpPr>
+          <p:cNvPr id="2" name="Slide Image Placeholder 1"/>
+          <p:cNvSpPr>
+            <a:spLocks noGrp="1" noRot="1" noChangeAspect="1"/>
+          </p:cNvSpPr>
+          <p:nvPr>
+            <p:ph type="sldImg"/>
+          </p:nvPr>
+        </p:nvSpPr>
+        <p:spPr/>
+      </p:sp>
+      <p:sp>
+        <p:nvSpPr>
+          <p:cNvPr id="3" name="Notes Placeholder 2"/>
+          <p:cNvSpPr>
+            <a:spLocks noGrp="1"/>
+          </p:cNvSpPr>
+          <p:nvPr>
+            <p:ph type="body" idx="1"/>
+          </p:nvPr>
+        </p:nvSpPr>
+        <p:spPr/>
+        <p:txBody>
+          <a:bodyPr/>
+          <a:lstStyle/>
+          <a:p>
+            <a:r>
+              <a:rPr lang="en-US" sz="1200" b="0" i="0" kern="1200" dirty="0">
+                <a:solidFill>
+                  <a:schemeClr val="tx1"/>
+                </a:solidFill>
+                <a:effectLst/>
+                <a:latin typeface="+mn-lt"/>
+                <a:ea typeface="+mn-ea"/>
+                <a:cs typeface="+mn-cs"/>
+              </a:rPr>
+              <a:t>remove removes the </a:t>
+            </a:r>
+            <a:r>
+              <a:rPr lang="en-US" sz="1200" b="0" i="1" kern="1200" dirty="0">
+                <a:solidFill>
+                  <a:schemeClr val="tx1"/>
+                </a:solidFill>
+                <a:effectLst/>
+                <a:latin typeface="+mn-lt"/>
+                <a:ea typeface="+mn-ea"/>
+                <a:cs typeface="+mn-cs"/>
+              </a:rPr>
+              <a:t>first</a:t>
+            </a:r>
+            <a:r>
+              <a:rPr lang="en-US" sz="1200" b="0" i="0" kern="1200" dirty="0">
+                <a:solidFill>
+                  <a:schemeClr val="tx1"/>
+                </a:solidFill>
+                <a:effectLst/>
+                <a:latin typeface="+mn-lt"/>
+                <a:ea typeface="+mn-ea"/>
+                <a:cs typeface="+mn-cs"/>
+              </a:rPr>
+              <a:t> matching </a:t>
+            </a:r>
+            <a:r>
+              <a:rPr lang="en-US" sz="1200" b="0" i="1" kern="1200" dirty="0">
+                <a:solidFill>
+                  <a:schemeClr val="tx1"/>
+                </a:solidFill>
+                <a:effectLst/>
+                <a:latin typeface="+mn-lt"/>
+                <a:ea typeface="+mn-ea"/>
+                <a:cs typeface="+mn-cs"/>
+              </a:rPr>
+              <a:t>value</a:t>
+            </a:r>
+            <a:r>
+              <a:rPr lang="en-US" sz="1200" b="0" i="0" kern="1200" dirty="0">
+                <a:solidFill>
+                  <a:schemeClr val="tx1"/>
+                </a:solidFill>
+                <a:effectLst/>
+                <a:latin typeface="+mn-lt"/>
+                <a:ea typeface="+mn-ea"/>
+                <a:cs typeface="+mn-cs"/>
+              </a:rPr>
+              <a:t>, not a specific index:</a:t>
+            </a:r>
+          </a:p>
+          <a:p>
+            <a:r>
+              <a:rPr lang="en-US" sz="1200" b="0" i="0" kern="1200" dirty="0">
+                <a:solidFill>
+                  <a:schemeClr val="tx1"/>
+                </a:solidFill>
+                <a:effectLst/>
+                <a:latin typeface="+mn-lt"/>
+                <a:ea typeface="+mn-ea"/>
+                <a:cs typeface="+mn-cs"/>
+              </a:rPr>
+              <a:t>del removes the item at a specific index: -&gt; </a:t>
+            </a:r>
+            <a:r>
+              <a:rPr lang="en-US" sz="1200" b="0" i="0" kern="1200" dirty="0" err="1">
+                <a:solidFill>
+                  <a:schemeClr val="tx1"/>
+                </a:solidFill>
+                <a:effectLst/>
+                <a:latin typeface="+mn-lt"/>
+                <a:ea typeface="+mn-ea"/>
+                <a:cs typeface="+mn-cs"/>
+              </a:rPr>
+              <a:t>dapat</a:t>
+            </a:r>
+            <a:r>
+              <a:rPr lang="en-US" sz="1200" b="0" i="0" kern="1200" dirty="0">
+                <a:solidFill>
+                  <a:schemeClr val="tx1"/>
+                </a:solidFill>
+                <a:effectLst/>
+                <a:latin typeface="+mn-lt"/>
+                <a:ea typeface="+mn-ea"/>
+                <a:cs typeface="+mn-cs"/>
+              </a:rPr>
+              <a:t> </a:t>
+            </a:r>
+            <a:r>
+              <a:rPr lang="en-US" sz="1200" b="0" i="0" kern="1200" dirty="0" err="1">
+                <a:solidFill>
+                  <a:schemeClr val="tx1"/>
+                </a:solidFill>
+                <a:effectLst/>
+                <a:latin typeface="+mn-lt"/>
+                <a:ea typeface="+mn-ea"/>
+                <a:cs typeface="+mn-cs"/>
+              </a:rPr>
+              <a:t>menghapus</a:t>
+            </a:r>
+            <a:r>
+              <a:rPr lang="en-US" sz="1200" b="0" i="0" kern="1200" dirty="0">
+                <a:solidFill>
+                  <a:schemeClr val="tx1"/>
+                </a:solidFill>
+                <a:effectLst/>
+                <a:latin typeface="+mn-lt"/>
+                <a:ea typeface="+mn-ea"/>
+                <a:cs typeface="+mn-cs"/>
+              </a:rPr>
+              <a:t> </a:t>
+            </a:r>
+            <a:r>
+              <a:rPr lang="en-US" sz="1200" b="0" i="0" kern="1200" dirty="0" err="1">
+                <a:solidFill>
+                  <a:schemeClr val="tx1"/>
+                </a:solidFill>
+                <a:effectLst/>
+                <a:latin typeface="+mn-lt"/>
+                <a:ea typeface="+mn-ea"/>
+                <a:cs typeface="+mn-cs"/>
+              </a:rPr>
+              <a:t>keseluruhan</a:t>
+            </a:r>
+            <a:r>
+              <a:rPr lang="en-US" sz="1200" b="0" i="0" kern="1200" dirty="0">
+                <a:solidFill>
+                  <a:schemeClr val="tx1"/>
+                </a:solidFill>
+                <a:effectLst/>
+                <a:latin typeface="+mn-lt"/>
+                <a:ea typeface="+mn-ea"/>
+                <a:cs typeface="+mn-cs"/>
+              </a:rPr>
+              <a:t> list </a:t>
+            </a:r>
+            <a:r>
+              <a:rPr lang="en-US" sz="1200" b="0" i="0" kern="1200" dirty="0" err="1">
+                <a:solidFill>
+                  <a:schemeClr val="tx1"/>
+                </a:solidFill>
+                <a:effectLst/>
+                <a:latin typeface="+mn-lt"/>
+                <a:ea typeface="+mn-ea"/>
+                <a:cs typeface="+mn-cs"/>
+              </a:rPr>
+              <a:t>jika</a:t>
+            </a:r>
+            <a:r>
+              <a:rPr lang="en-US" sz="1200" b="0" i="0" kern="1200" dirty="0">
+                <a:solidFill>
+                  <a:schemeClr val="tx1"/>
+                </a:solidFill>
+                <a:effectLst/>
+                <a:latin typeface="+mn-lt"/>
+                <a:ea typeface="+mn-ea"/>
+                <a:cs typeface="+mn-cs"/>
+              </a:rPr>
+              <a:t> </a:t>
+            </a:r>
+            <a:r>
+              <a:rPr lang="en-US" sz="1200" b="0" i="0" kern="1200" dirty="0" err="1">
+                <a:solidFill>
+                  <a:schemeClr val="tx1"/>
+                </a:solidFill>
+                <a:effectLst/>
+                <a:latin typeface="+mn-lt"/>
+                <a:ea typeface="+mn-ea"/>
+                <a:cs typeface="+mn-cs"/>
+              </a:rPr>
+              <a:t>dipanggil</a:t>
+            </a:r>
+            <a:r>
+              <a:rPr lang="en-US" sz="1200" b="0" i="0" kern="1200" dirty="0">
+                <a:solidFill>
+                  <a:schemeClr val="tx1"/>
+                </a:solidFill>
+                <a:effectLst/>
+                <a:latin typeface="+mn-lt"/>
+                <a:ea typeface="+mn-ea"/>
+                <a:cs typeface="+mn-cs"/>
+              </a:rPr>
+              <a:t> nama </a:t>
+            </a:r>
+            <a:r>
+              <a:rPr lang="en-US" sz="1200" b="0" i="0" kern="1200">
+                <a:solidFill>
+                  <a:schemeClr val="tx1"/>
+                </a:solidFill>
+                <a:effectLst/>
+                <a:latin typeface="+mn-lt"/>
+                <a:ea typeface="+mn-ea"/>
+                <a:cs typeface="+mn-cs"/>
+              </a:rPr>
+              <a:t>variabel</a:t>
+            </a:r>
+            <a:endParaRPr lang="en-US" sz="1200" b="0" i="0" kern="1200" dirty="0">
+              <a:solidFill>
+                <a:schemeClr val="tx1"/>
+              </a:solidFill>
+              <a:effectLst/>
+              <a:latin typeface="+mn-lt"/>
+              <a:ea typeface="+mn-ea"/>
+              <a:cs typeface="+mn-cs"/>
+            </a:endParaRPr>
+          </a:p>
+          <a:p>
+            <a:r>
+              <a:rPr lang="en-US" sz="1200" b="0" i="0" kern="1200" dirty="0">
+                <a:solidFill>
+                  <a:schemeClr val="tx1"/>
+                </a:solidFill>
+                <a:effectLst/>
+                <a:latin typeface="+mn-lt"/>
+                <a:ea typeface="+mn-ea"/>
+                <a:cs typeface="+mn-cs"/>
+              </a:rPr>
+              <a:t>and pop removes the item at a specific index and returns it. -&gt; </a:t>
+            </a:r>
+            <a:r>
+              <a:rPr lang="en-US" sz="1200" b="0" i="0" kern="1200" dirty="0" err="1">
+                <a:solidFill>
+                  <a:schemeClr val="tx1"/>
+                </a:solidFill>
+                <a:effectLst/>
+                <a:latin typeface="+mn-lt"/>
+                <a:ea typeface="+mn-ea"/>
+                <a:cs typeface="+mn-cs"/>
+              </a:rPr>
+              <a:t>nilai</a:t>
+            </a:r>
+            <a:r>
+              <a:rPr lang="en-US" sz="1200" b="0" i="0" kern="1200" dirty="0">
+                <a:solidFill>
+                  <a:schemeClr val="tx1"/>
+                </a:solidFill>
+                <a:effectLst/>
+                <a:latin typeface="+mn-lt"/>
+                <a:ea typeface="+mn-ea"/>
+                <a:cs typeface="+mn-cs"/>
+              </a:rPr>
+              <a:t> yang </a:t>
+            </a:r>
+            <a:r>
+              <a:rPr lang="en-US" sz="1200" b="0" i="0" kern="1200" dirty="0" err="1">
+                <a:solidFill>
+                  <a:schemeClr val="tx1"/>
+                </a:solidFill>
+                <a:effectLst/>
+                <a:latin typeface="+mn-lt"/>
+                <a:ea typeface="+mn-ea"/>
+                <a:cs typeface="+mn-cs"/>
+              </a:rPr>
+              <a:t>dihapus</a:t>
+            </a:r>
+            <a:r>
+              <a:rPr lang="en-US" sz="1200" b="0" i="0" kern="1200" dirty="0">
+                <a:solidFill>
+                  <a:schemeClr val="tx1"/>
+                </a:solidFill>
+                <a:effectLst/>
+                <a:latin typeface="+mn-lt"/>
+                <a:ea typeface="+mn-ea"/>
+                <a:cs typeface="+mn-cs"/>
+              </a:rPr>
+              <a:t> </a:t>
+            </a:r>
+            <a:r>
+              <a:rPr lang="en-US" sz="1200" b="0" i="0" kern="1200" dirty="0" err="1">
+                <a:solidFill>
+                  <a:schemeClr val="tx1"/>
+                </a:solidFill>
+                <a:effectLst/>
+                <a:latin typeface="+mn-lt"/>
+                <a:ea typeface="+mn-ea"/>
+                <a:cs typeface="+mn-cs"/>
+              </a:rPr>
+              <a:t>akan</a:t>
+            </a:r>
+            <a:r>
+              <a:rPr lang="en-US" sz="1200" b="0" i="0" kern="1200" dirty="0">
+                <a:solidFill>
+                  <a:schemeClr val="tx1"/>
+                </a:solidFill>
+                <a:effectLst/>
+                <a:latin typeface="+mn-lt"/>
+                <a:ea typeface="+mn-ea"/>
+                <a:cs typeface="+mn-cs"/>
+              </a:rPr>
+              <a:t> </a:t>
+            </a:r>
+            <a:r>
+              <a:rPr lang="en-US" sz="1200" b="0" i="0" kern="1200" dirty="0" err="1">
+                <a:solidFill>
+                  <a:schemeClr val="tx1"/>
+                </a:solidFill>
+                <a:effectLst/>
+                <a:latin typeface="+mn-lt"/>
+                <a:ea typeface="+mn-ea"/>
+                <a:cs typeface="+mn-cs"/>
+              </a:rPr>
+              <a:t>ditampilkan</a:t>
+            </a:r>
+            <a:endParaRPr lang="en-ID" dirty="0"/>
+          </a:p>
+        </p:txBody>
+      </p:sp>
+      <p:sp>
+        <p:nvSpPr>
+          <p:cNvPr id="4" name="Slide Number Placeholder 3"/>
+          <p:cNvSpPr>
+            <a:spLocks noGrp="1"/>
+          </p:cNvSpPr>
+          <p:nvPr>
+            <p:ph type="sldNum" sz="quarter" idx="5"/>
+          </p:nvPr>
+        </p:nvSpPr>
+        <p:spPr/>
+        <p:txBody>
+          <a:bodyPr/>
+          <a:lstStyle/>
+          <a:p>
+            <a:fld id="{F79F7C49-7D01-443B-8702-3950AAAC7A01}" type="slidenum">
+              <a:rPr lang="en-ID" smtClean="0"/>
+              <a:t>11</a:t>
+            </a:fld>
+            <a:endParaRPr lang="en-ID"/>
+          </a:p>
+        </p:txBody>
+      </p:sp>
+    </p:spTree>
+    <p:extLst>
+      <p:ext uri="{BB962C8B-B14F-4D97-AF65-F5344CB8AC3E}">
+        <p14:creationId xmlns:p14="http://schemas.microsoft.com/office/powerpoint/2010/main" val="2453735232"/>
+      </p:ext>
+    </p:extLst>
+  </p:cSld>
+  <p:clrMapOvr>
+    <a:masterClrMapping/>
+  </p:clrMapOvr>
+</p:notes>
 </file>
 
 <file path=ppt/slideLayouts/slideLayout1.xml><?xml version="1.0" encoding="utf-8"?>
@@ -4074,7 +4471,7 @@
             </a:r>
             <a:r>
               <a:rPr lang="en-ID" sz="1800" dirty="0"/>
-              <a:t>Thursday, 19 December 2024</a:t>
+              <a:t>Wednesday, 07 January 2026</a:t>
             </a:r>
           </a:p>
           <a:p>
@@ -4463,7 +4860,7 @@
           <a:p>
             <a:r>
               <a:rPr lang="en-US" dirty="0"/>
-              <a:t>December 19, 2024</a:t>
+              <a:t>Wednesday, 07 January 2026</a:t>
             </a:r>
             <a:endParaRPr lang="en-ID" dirty="0"/>
           </a:p>
@@ -5490,7 +5887,7 @@
           <a:p>
             <a:r>
               <a:rPr lang="en-US" dirty="0"/>
-              <a:t>December 19, 2024</a:t>
+              <a:t>Wednesday, 07 January 2026</a:t>
             </a:r>
             <a:endParaRPr lang="en-ID" dirty="0"/>
           </a:p>
@@ -5570,7 +5967,7 @@
           <p:nvPr/>
         </p:nvPicPr>
         <p:blipFill>
-          <a:blip r:embed="rId2"/>
+          <a:blip r:embed="rId3"/>
           <a:stretch>
             <a:fillRect/>
           </a:stretch>
@@ -5600,7 +5997,7 @@
           <p:nvPr/>
         </p:nvPicPr>
         <p:blipFill>
-          <a:blip r:embed="rId3"/>
+          <a:blip r:embed="rId4"/>
           <a:stretch>
             <a:fillRect/>
           </a:stretch>
@@ -5630,7 +6027,7 @@
           <p:nvPr/>
         </p:nvPicPr>
         <p:blipFill>
-          <a:blip r:embed="rId4"/>
+          <a:blip r:embed="rId5"/>
           <a:stretch>
             <a:fillRect/>
           </a:stretch>
@@ -5660,7 +6057,7 @@
           <p:nvPr/>
         </p:nvPicPr>
         <p:blipFill>
-          <a:blip r:embed="rId5"/>
+          <a:blip r:embed="rId6"/>
           <a:stretch>
             <a:fillRect/>
           </a:stretch>
@@ -5690,7 +6087,7 @@
           <p:nvPr/>
         </p:nvPicPr>
         <p:blipFill>
-          <a:blip r:embed="rId6"/>
+          <a:blip r:embed="rId7"/>
           <a:stretch>
             <a:fillRect/>
           </a:stretch>
@@ -5720,7 +6117,7 @@
           <p:nvPr/>
         </p:nvPicPr>
         <p:blipFill>
-          <a:blip r:embed="rId7"/>
+          <a:blip r:embed="rId8"/>
           <a:stretch>
             <a:fillRect/>
           </a:stretch>
@@ -5750,7 +6147,7 @@
           <p:nvPr/>
         </p:nvPicPr>
         <p:blipFill>
-          <a:blip r:embed="rId8"/>
+          <a:blip r:embed="rId9"/>
           <a:stretch>
             <a:fillRect/>
           </a:stretch>
@@ -5975,7 +6372,7 @@
           <a:p>
             <a:r>
               <a:rPr lang="en-US" dirty="0"/>
-              <a:t>December 19, 2024</a:t>
+              <a:t>Wednesday, 07 January 2026</a:t>
             </a:r>
             <a:endParaRPr lang="en-ID" dirty="0"/>
           </a:p>
@@ -6809,7 +7206,7 @@
           <a:p>
             <a:r>
               <a:rPr lang="en-US" dirty="0"/>
-              <a:t>December 19, 2024</a:t>
+              <a:t>Wednesday, 07 January 2026</a:t>
             </a:r>
             <a:endParaRPr lang="en-ID" dirty="0"/>
           </a:p>
@@ -7101,7 +7498,7 @@
           <a:p>
             <a:r>
               <a:rPr lang="en-US" dirty="0"/>
-              <a:t>December 19, 2024</a:t>
+              <a:t>Wednesday, 07 January 2026</a:t>
             </a:r>
             <a:endParaRPr lang="en-ID" dirty="0"/>
           </a:p>
@@ -7423,7 +7820,7 @@
           <a:p>
             <a:r>
               <a:rPr lang="en-US" dirty="0"/>
-              <a:t>December 19, 2024</a:t>
+              <a:t>Wednesday, 07 January 2026</a:t>
             </a:r>
             <a:endParaRPr lang="en-ID" dirty="0"/>
           </a:p>
@@ -8237,7 +8634,7 @@
           <a:p>
             <a:r>
               <a:rPr lang="en-US" dirty="0"/>
-              <a:t>December 19, 2024</a:t>
+              <a:t>Wednesday, 07 January 2026</a:t>
             </a:r>
             <a:endParaRPr lang="en-ID" dirty="0"/>
           </a:p>
@@ -8559,7 +8956,7 @@
           <a:p>
             <a:r>
               <a:rPr lang="en-US" dirty="0"/>
-              <a:t>December 19, 2024</a:t>
+              <a:t>Wednesday, 07 January 2026</a:t>
             </a:r>
             <a:endParaRPr lang="en-ID" dirty="0"/>
           </a:p>
@@ -8819,7 +9216,7 @@
           <a:p>
             <a:r>
               <a:rPr lang="en-US" dirty="0"/>
-              <a:t>December 19, 2024</a:t>
+              <a:t>Wednesday, 07 January 2026</a:t>
             </a:r>
             <a:endParaRPr lang="en-ID" dirty="0"/>
           </a:p>
@@ -9187,7 +9584,7 @@
           <a:p>
             <a:r>
               <a:rPr lang="en-US" dirty="0"/>
-              <a:t>December 19, 2024</a:t>
+              <a:t>Wednesday, 07 January 2026</a:t>
             </a:r>
             <a:endParaRPr lang="en-ID" dirty="0"/>
           </a:p>
@@ -9546,10 +9943,9 @@
           <a:lstStyle/>
           <a:p>
             <a:r>
-              <a:rPr lang="en-US" dirty="0"/>
-              <a:t>December 19, 2024</a:t>
-            </a:r>
-            <a:endParaRPr lang="en-ID" dirty="0"/>
+              <a:rPr lang="en-ID" dirty="0"/>
+              <a:t>Wednesday, 07 January 2026</a:t>
+            </a:r>
           </a:p>
         </p:txBody>
       </p:sp>
@@ -9735,7 +10131,7 @@
           <a:p>
             <a:r>
               <a:rPr lang="en-US" dirty="0"/>
-              <a:t>December 19, 2024</a:t>
+              <a:t>Wednesday, 07 January 2026</a:t>
             </a:r>
             <a:endParaRPr lang="en-ID" dirty="0"/>
           </a:p>
@@ -9963,7 +10359,7 @@
           <a:p>
             <a:r>
               <a:rPr lang="en-US" dirty="0"/>
-              <a:t>December 19, 2024</a:t>
+              <a:t>Wednesday, 07 January 2026</a:t>
             </a:r>
             <a:endParaRPr lang="en-ID" dirty="0"/>
           </a:p>
@@ -10472,7 +10868,7 @@
           <a:p>
             <a:r>
               <a:rPr lang="en-US" dirty="0"/>
-              <a:t>December 19, 2024</a:t>
+              <a:t>Wednesday, 07 January 2026</a:t>
             </a:r>
             <a:endParaRPr lang="en-ID" dirty="0"/>
           </a:p>
@@ -10704,7 +11100,7 @@
           <a:p>
             <a:r>
               <a:rPr lang="en-US" dirty="0"/>
-              <a:t>December 19, 2024</a:t>
+              <a:t>Wednesday, 07 January 2026</a:t>
             </a:r>
             <a:endParaRPr lang="en-ID" dirty="0"/>
           </a:p>
@@ -10985,7 +11381,7 @@
           <a:p>
             <a:r>
               <a:rPr lang="en-US" dirty="0"/>
-              <a:t>December 19, 2024</a:t>
+              <a:t>Wednesday, 07 January 2026</a:t>
             </a:r>
             <a:endParaRPr lang="en-ID" dirty="0"/>
           </a:p>
@@ -11201,7 +11597,7 @@
           <a:p>
             <a:r>
               <a:rPr lang="en-US" dirty="0"/>
-              <a:t>December 19, 2024</a:t>
+              <a:t>Wednesday, 07 January 2026</a:t>
             </a:r>
             <a:endParaRPr lang="en-ID" dirty="0"/>
           </a:p>
@@ -11447,7 +11843,7 @@
           <a:p>
             <a:r>
               <a:rPr lang="en-US" dirty="0"/>
-              <a:t>December 19, 2024</a:t>
+              <a:t>Wednesday, 07 January 2026</a:t>
             </a:r>
             <a:endParaRPr lang="en-ID" dirty="0"/>
           </a:p>
@@ -11711,7 +12107,7 @@
           <a:p>
             <a:r>
               <a:rPr lang="en-US" dirty="0"/>
-              <a:t>December 19, 2024</a:t>
+              <a:t>Wednesday, 07 January 2026</a:t>
             </a:r>
             <a:endParaRPr lang="en-ID" dirty="0"/>
           </a:p>
@@ -11947,7 +12343,7 @@
           <a:p>
             <a:r>
               <a:rPr lang="en-US" dirty="0"/>
-              <a:t>December 19, 2024</a:t>
+              <a:t>Wednesday, 07 January 2026</a:t>
             </a:r>
             <a:endParaRPr lang="en-ID" dirty="0"/>
           </a:p>
@@ -12199,7 +12595,7 @@
           <a:p>
             <a:r>
               <a:rPr lang="en-US" dirty="0"/>
-              <a:t>December 19, 2024</a:t>
+              <a:t>Wednesday, 07 January 2026</a:t>
             </a:r>
             <a:endParaRPr lang="en-ID" dirty="0"/>
           </a:p>
@@ -12558,7 +12954,7 @@
           <a:p>
             <a:r>
               <a:rPr lang="en-US" dirty="0"/>
-              <a:t>December 19, 2024</a:t>
+              <a:t>Wednesday, 07 January 2026</a:t>
             </a:r>
             <a:endParaRPr lang="en-ID" dirty="0"/>
           </a:p>
@@ -12772,7 +13168,7 @@
           <a:p>
             <a:r>
               <a:rPr lang="en-US" dirty="0"/>
-              <a:t>December 19, 2024</a:t>
+              <a:t>Wednesday, 07 January 2026</a:t>
             </a:r>
             <a:endParaRPr lang="en-ID" dirty="0"/>
           </a:p>
@@ -13312,7 +13708,7 @@
           <a:p>
             <a:r>
               <a:rPr lang="en-US" dirty="0"/>
-              <a:t>December 19, 2024</a:t>
+              <a:t>Wednesday, 07 January 2026</a:t>
             </a:r>
             <a:endParaRPr lang="en-ID" dirty="0"/>
           </a:p>
@@ -13931,7 +14327,7 @@
           <a:p>
             <a:r>
               <a:rPr lang="en-US" dirty="0"/>
-              <a:t>December 19, 2024</a:t>
+              <a:t>Wednesday, 07 January 2026</a:t>
             </a:r>
             <a:endParaRPr lang="en-ID" dirty="0"/>
           </a:p>
@@ -14225,7 +14621,7 @@
           <a:p>
             <a:r>
               <a:rPr lang="en-US" dirty="0"/>
-              <a:t>December 19, 2024</a:t>
+              <a:t>Wednesday, 07 January 2026</a:t>
             </a:r>
             <a:endParaRPr lang="en-ID" dirty="0"/>
           </a:p>
@@ -14530,7 +14926,7 @@
           <a:p>
             <a:r>
               <a:rPr lang="en-US" dirty="0"/>
-              <a:t>December 19, 2024</a:t>
+              <a:t>Wednesday, 07 January 2026</a:t>
             </a:r>
             <a:endParaRPr lang="en-ID" dirty="0"/>
           </a:p>
@@ -14895,7 +15291,7 @@
           <a:p>
             <a:r>
               <a:rPr lang="en-US" dirty="0"/>
-              <a:t>December 19, 2024</a:t>
+              <a:t>Wednesday, 07 January 2026</a:t>
             </a:r>
             <a:endParaRPr lang="en-ID" dirty="0"/>
           </a:p>
@@ -15219,7 +15615,7 @@
           <a:p>
             <a:r>
               <a:rPr lang="en-US" dirty="0"/>
-              <a:t>December 19, 2024</a:t>
+              <a:t>Wednesday, 07 January 2026</a:t>
             </a:r>
             <a:endParaRPr lang="en-ID" dirty="0"/>
           </a:p>
@@ -15501,7 +15897,7 @@
           <a:p>
             <a:r>
               <a:rPr lang="en-US" dirty="0"/>
-              <a:t>December 19, 2024</a:t>
+              <a:t>Wednesday, 07 January 2026</a:t>
             </a:r>
             <a:endParaRPr lang="en-ID" dirty="0"/>
           </a:p>
@@ -15775,7 +16171,7 @@
           <a:p>
             <a:r>
               <a:rPr lang="en-US" dirty="0"/>
-              <a:t>December 19, 2024</a:t>
+              <a:t>Wednesday, 07 January 2026</a:t>
             </a:r>
             <a:endParaRPr lang="en-ID" dirty="0"/>
           </a:p>
@@ -16302,7 +16698,7 @@
           <a:p>
             <a:r>
               <a:rPr lang="en-US" dirty="0"/>
-              <a:t>December 19, 2024</a:t>
+              <a:t>Wednesday, 07 January 2026</a:t>
             </a:r>
             <a:endParaRPr lang="en-ID" dirty="0"/>
           </a:p>
@@ -16620,7 +17016,7 @@
           <a:p>
             <a:r>
               <a:rPr lang="en-US" dirty="0"/>
-              <a:t>December 19, 2024</a:t>
+              <a:t>Wednesday, 07 January 2026</a:t>
             </a:r>
             <a:endParaRPr lang="en-ID" dirty="0"/>
           </a:p>
@@ -17019,7 +17415,7 @@
           <a:p>
             <a:r>
               <a:rPr lang="en-US" dirty="0"/>
-              <a:t>December 19, 2024</a:t>
+              <a:t>Wednesday, 07 January 2026</a:t>
             </a:r>
             <a:endParaRPr lang="en-ID" dirty="0"/>
           </a:p>
@@ -17289,7 +17685,7 @@
           <a:p>
             <a:r>
               <a:rPr lang="en-US" dirty="0"/>
-              <a:t>December 19, 2024</a:t>
+              <a:t>Wednesday, 07 January 2026</a:t>
             </a:r>
             <a:endParaRPr lang="en-ID" dirty="0"/>
           </a:p>
@@ -17593,7 +17989,7 @@
           <a:p>
             <a:r>
               <a:rPr lang="en-US" dirty="0"/>
-              <a:t>December 19, 2024</a:t>
+              <a:t>Wednesday, 07 January 2026</a:t>
             </a:r>
             <a:endParaRPr lang="en-ID" dirty="0"/>
           </a:p>
@@ -17885,7 +18281,7 @@
           <a:p>
             <a:r>
               <a:rPr lang="en-US" dirty="0"/>
-              <a:t>December 19, 2024</a:t>
+              <a:t>Wednesday, 07 January 2026</a:t>
             </a:r>
             <a:endParaRPr lang="en-ID" dirty="0"/>
           </a:p>
@@ -18241,7 +18637,7 @@
           <a:p>
             <a:r>
               <a:rPr lang="en-US" dirty="0"/>
-              <a:t>December 19, 2024</a:t>
+              <a:t>Wednesday, 07 January 2026</a:t>
             </a:r>
             <a:endParaRPr lang="en-ID" dirty="0"/>
           </a:p>
@@ -18516,7 +18912,7 @@
           <a:p>
             <a:r>
               <a:rPr lang="en-US" dirty="0"/>
-              <a:t>December 19, 2024</a:t>
+              <a:t>Wednesday, 07 January 2026</a:t>
             </a:r>
             <a:endParaRPr lang="en-ID" dirty="0"/>
           </a:p>
@@ -18813,7 +19209,7 @@
           <a:p>
             <a:r>
               <a:rPr lang="en-US" dirty="0"/>
-              <a:t>December 19, 2024</a:t>
+              <a:t>Wednesday, 07 January 2026</a:t>
             </a:r>
             <a:endParaRPr lang="en-ID" dirty="0"/>
           </a:p>
@@ -19110,7 +19506,7 @@
           <a:p>
             <a:r>
               <a:rPr lang="en-US" dirty="0"/>
-              <a:t>December 19, 2024</a:t>
+              <a:t>Wednesday, 07 January 2026</a:t>
             </a:r>
             <a:endParaRPr lang="en-ID" dirty="0"/>
           </a:p>
@@ -19397,7 +19793,7 @@
           <a:p>
             <a:r>
               <a:rPr lang="en-US" dirty="0"/>
-              <a:t>December 19, 2024</a:t>
+              <a:t>Wednesday, 07 January 2026</a:t>
             </a:r>
             <a:endParaRPr lang="en-ID" dirty="0"/>
           </a:p>
@@ -19692,7 +20088,7 @@
           <a:p>
             <a:r>
               <a:rPr lang="en-US" dirty="0"/>
-              <a:t>December 19, 2024</a:t>
+              <a:t>Wednesday, 07 January 2026</a:t>
             </a:r>
             <a:endParaRPr lang="en-ID" dirty="0"/>
           </a:p>
@@ -19976,7 +20372,7 @@
           <a:p>
             <a:r>
               <a:rPr lang="en-US" dirty="0"/>
-              <a:t>December 19, 2024</a:t>
+              <a:t>Wednesday, 07 January 2026</a:t>
             </a:r>
             <a:endParaRPr lang="en-ID" dirty="0"/>
           </a:p>
@@ -20539,7 +20935,7 @@
           <a:p>
             <a:r>
               <a:rPr lang="en-US" dirty="0"/>
-              <a:t>December 19, 2024</a:t>
+              <a:t>Wednesday, 07 January 2026</a:t>
             </a:r>
             <a:endParaRPr lang="en-ID" dirty="0"/>
           </a:p>
@@ -20891,7 +21287,7 @@
           <a:p>
             <a:r>
               <a:rPr lang="en-US" dirty="0"/>
-              <a:t>December 19, 2024</a:t>
+              <a:t>Wednesday, 07 January 2026</a:t>
             </a:r>
             <a:endParaRPr lang="en-ID" dirty="0"/>
           </a:p>
@@ -21111,7 +21507,7 @@
           <a:p>
             <a:r>
               <a:rPr lang="en-US" dirty="0"/>
-              <a:t>December 19, 2024</a:t>
+              <a:t>Wednesday, 07 January 2026</a:t>
             </a:r>
             <a:endParaRPr lang="en-ID" dirty="0"/>
           </a:p>
@@ -21753,7 +22149,7 @@
           <a:p>
             <a:r>
               <a:rPr lang="en-US" dirty="0"/>
-              <a:t>December 19, 2024</a:t>
+              <a:t>Wednesday, 07 January 2026</a:t>
             </a:r>
             <a:endParaRPr lang="en-ID" dirty="0"/>
           </a:p>
@@ -22182,7 +22578,7 @@
           <a:p>
             <a:r>
               <a:rPr lang="en-US" dirty="0"/>
-              <a:t>December 19, 2024</a:t>
+              <a:t>Wednesday, 07 January 2026</a:t>
             </a:r>
             <a:endParaRPr lang="en-ID" dirty="0"/>
           </a:p>
@@ -22826,7 +23222,7 @@
           <a:p>
             <a:r>
               <a:rPr lang="en-US" dirty="0"/>
-              <a:t>December 19, 2024</a:t>
+              <a:t>Wednesday, 07 January 2026</a:t>
             </a:r>
             <a:endParaRPr lang="en-ID" dirty="0"/>
           </a:p>
